--- a/media/resources/files/EkiOrunduuOnduktar_Koboytuu_XO_gj3tYna.pptx
+++ b/media/resources/files/EkiOrunduuOnduktar_Koboytuu_XO_gj3tYna.pptx
@@ -8510,7 +8510,7 @@
                 <a:ea typeface="+mn-ea"/>
                 <a:cs typeface="+mn-cs"/>
               </a:rPr>
-              <a:t>Турдуу пикирлер учун ыраазычылык билдиребиз.</a:t>
+              <a:t>Түрдүү пикирлер үчүн ыраазычылык билдиребиз.</a:t>
             </a:r>
           </a:p>
           <a:p>

--- a/media/resources/files/EkiOrunduuOnduktar_Koboytuu_XO_gj3tYna.pptx
+++ b/media/resources/files/EkiOrunduuOnduktar_Koboytuu_XO_gj3tYna.pptx
@@ -3908,7 +3908,7 @@
                 <a:ea typeface="+mn-ea"/>
                 <a:cs typeface="Arial" panose="020B0604020202020204" pitchFamily="34" charset="0"/>
               </a:rPr>
-              <a:t>Мугалим үчүн жооп баракчасы жана таратма материалдар камтылган.</a:t>
+              <a:t>Мугалим үчүн жооп барагы жана таратма материалдар бар.</a:t>
             </a:r>
           </a:p>
           <a:p>
@@ -3977,7 +3977,7 @@
                 <a:ea typeface="+mn-ea"/>
                 <a:cs typeface="Arial" panose="020B0604020202020204" pitchFamily="34" charset="0"/>
               </a:rPr>
-              <a:t>Кайсы команда туура жооп бергенине жараша '</a:t>
+              <a:t>Туура жооп берген командага жараша «</a:t>
             </a:r>
             <a:r>
               <a:rPr kumimoji="0" lang="en-GB" sz="2000" b="0" i="0" u="sng" strike="noStrike" kern="1200" cap="none" spc="0" normalizeH="0" baseline="0" noProof="0" dirty="0">
@@ -3994,7 +3994,7 @@
                 <a:ea typeface="+mn-ea"/>
                 <a:cs typeface="Arial" panose="020B0604020202020204" pitchFamily="34" charset="0"/>
               </a:rPr>
-              <a:t>X' </a:t>
+              <a:t>X» </a:t>
             </a:r>
             <a:r>
               <a:rPr kumimoji="0" lang="ru-RU" sz="2000" b="0" i="0" u="sng" strike="noStrike" kern="1200" cap="none" spc="0" normalizeH="0" baseline="0" noProof="0" dirty="0">
@@ -4011,7 +4011,7 @@
                 <a:ea typeface="+mn-ea"/>
                 <a:cs typeface="Arial" panose="020B0604020202020204" pitchFamily="34" charset="0"/>
               </a:rPr>
-              <a:t>же '</a:t>
+              <a:t>же «</a:t>
             </a:r>
             <a:r>
               <a:rPr kumimoji="0" lang="en-GB" sz="2000" b="0" i="0" u="sng" strike="noStrike" kern="1200" cap="none" spc="0" normalizeH="0" baseline="0" noProof="0" dirty="0">
@@ -4028,7 +4028,7 @@
                 <a:ea typeface="+mn-ea"/>
                 <a:cs typeface="Arial" panose="020B0604020202020204" pitchFamily="34" charset="0"/>
               </a:rPr>
-              <a:t>O' </a:t>
+              <a:t>O» </a:t>
             </a:r>
             <a:r>
               <a:rPr kumimoji="0" lang="ru-RU" sz="2000" b="0" i="0" u="sng" strike="noStrike" kern="1200" cap="none" spc="0" normalizeH="0" baseline="0" noProof="0" dirty="0">
@@ -4045,7 +4045,7 @@
                 <a:ea typeface="+mn-ea"/>
                 <a:cs typeface="Arial" panose="020B0604020202020204" pitchFamily="34" charset="0"/>
               </a:rPr>
-              <a:t>баскычын басыңыз/тийип коюңуз</a:t>
+              <a:t>баскычын басыңыз</a:t>
             </a:r>
             <a:r>
               <a:rPr kumimoji="0" lang="en-GB" sz="2000" b="0" i="0" u="none" strike="noStrike" kern="1200" cap="none" spc="0" normalizeH="0" baseline="0" noProof="0" dirty="0">
@@ -4662,7 +4662,7 @@
             <a:pPr algn="ctr"/>
             <a:r>
               <a:rPr lang="en-GB" sz="4400" dirty="0"/>
-              <a:t>0.7 × 1.2</a:t>
+              <a:t>0,7 × 1,2</a:t>
             </a:r>
           </a:p>
         </p:txBody>
@@ -4703,7 +4703,7 @@
             <a:pPr algn="ctr"/>
             <a:r>
               <a:rPr lang="en-GB" sz="4400" dirty="0"/>
-              <a:t>0.28 × 0.6</a:t>
+              <a:t>0,28 × 0,6</a:t>
             </a:r>
           </a:p>
         </p:txBody>
@@ -4744,7 +4744,7 @@
             <a:pPr algn="ctr"/>
             <a:r>
               <a:rPr lang="en-GB" sz="4400" dirty="0"/>
-              <a:t>6 × 0.2</a:t>
+              <a:t>6 × 0,2</a:t>
             </a:r>
           </a:p>
         </p:txBody>
@@ -4785,7 +4785,7 @@
             <a:pPr algn="ctr"/>
             <a:r>
               <a:rPr lang="en-GB" sz="4400" dirty="0"/>
-              <a:t>1.7 × 1.8</a:t>
+              <a:t>1,7 × 1,8</a:t>
             </a:r>
           </a:p>
         </p:txBody>
@@ -4826,7 +4826,7 @@
             <a:pPr algn="ctr"/>
             <a:r>
               <a:rPr lang="en-GB" sz="4400" dirty="0"/>
-              <a:t>0.16 × 0.51</a:t>
+              <a:t>0,16 × 0,51</a:t>
             </a:r>
           </a:p>
         </p:txBody>
@@ -4867,7 +4867,7 @@
             <a:pPr algn="ctr"/>
             <a:r>
               <a:rPr lang="en-GB" sz="4400" dirty="0"/>
-              <a:t>1.1 × 2.1</a:t>
+              <a:t>1,1 × 2,1</a:t>
             </a:r>
           </a:p>
         </p:txBody>
@@ -4908,7 +4908,7 @@
             <a:pPr algn="ctr"/>
             <a:r>
               <a:rPr lang="en-GB" sz="4400" dirty="0"/>
-              <a:t>5.3 × 4</a:t>
+              <a:t>5,3 × 4</a:t>
             </a:r>
           </a:p>
         </p:txBody>
@@ -4949,7 +4949,7 @@
             <a:pPr algn="ctr"/>
             <a:r>
               <a:rPr lang="en-GB" sz="4400" dirty="0"/>
-              <a:t>0.3 × 0.19</a:t>
+              <a:t>0,3 × 0,19</a:t>
             </a:r>
           </a:p>
         </p:txBody>
@@ -4990,7 +4990,7 @@
             <a:pPr algn="ctr"/>
             <a:r>
               <a:rPr lang="en-GB" sz="4400" dirty="0"/>
-              <a:t>1.3 × 0.4</a:t>
+              <a:t>1,3 × 0,4</a:t>
             </a:r>
           </a:p>
         </p:txBody>
